--- a/decks/imverica-pitch.pptx
+++ b/decks/imverica-pitch.pptx
@@ -2719,7 +2719,7 @@
                 <a:ea typeface="Georgia" pitchFamily="34" charset="-122"/>
                 <a:cs typeface="Georgia" pitchFamily="34" charset="-120"/>
               </a:rPr>
-              <a:t>FK</a:t>
+              <a:t>IM</a:t>
             </a:r>
             <a:endParaRPr lang="en-US" sz="3600" dirty="0"/>
           </a:p>
@@ -2758,7 +2758,7 @@
                 <a:ea typeface="Georgia" pitchFamily="34" charset="-122"/>
                 <a:cs typeface="Georgia" pitchFamily="34" charset="-120"/>
               </a:rPr>
-              <a:t>Farruh Kochkarov</a:t>
+              <a:t>Founder</a:t>
             </a:r>
             <a:endParaRPr lang="en-US" sz="2200" dirty="0"/>
           </a:p>
@@ -2797,7 +2797,7 @@
                 <a:ea typeface="Helvetica Neue" pitchFamily="34" charset="-122"/>
                 <a:cs typeface="Helvetica Neue" pitchFamily="34" charset="-120"/>
               </a:rPr>
-              <a:t>Founder · LDA · Immigration Consultant</a:t>
+              <a:t>LDA · Immigration Consultant</a:t>
             </a:r>
             <a:endParaRPr lang="en-US" sz="1100" dirty="0"/>
           </a:p>
